--- a/proposals/機種分析/ヨルムンガンド/yormungand_guide_v2.pptx
+++ b/proposals/機種分析/ヨルムンガンド/yormungand_guide_v2.pptx
@@ -3784,7 +3784,7 @@
         <p:spPr>
           <a:xfrm>
             <a:off x="5084064" y="384048"/>
-            <a:ext cx="3840480" cy="1325880"/>
+            <a:ext cx="3840480" cy="1261872"/>
           </a:xfrm>
           <a:prstGeom prst="rect">
             <a:avLst/>
@@ -3829,7 +3829,7 @@
         <p:spPr>
           <a:xfrm>
             <a:off x="5084064" y="384048"/>
-            <a:ext cx="55000" cy="1325880"/>
+            <a:ext cx="55000" cy="1261872"/>
           </a:xfrm>
           <a:prstGeom prst="rect">
             <a:avLst/>
@@ -3871,8 +3871,8 @@
         </p:nvSpPr>
         <p:spPr>
           <a:xfrm>
-            <a:off x="5266944" y="454048"/>
-            <a:ext cx="3474720" cy="380000"/>
+            <a:off x="5266944" y="449048"/>
+            <a:ext cx="3474720" cy="340000"/>
           </a:xfrm>
           <a:prstGeom prst="rect">
             <a:avLst/>
@@ -3907,8 +3907,8 @@
         </p:nvSpPr>
         <p:spPr>
           <a:xfrm>
-            <a:off x="5266944" y="834048"/>
-            <a:ext cx="3474720" cy="500000"/>
+            <a:off x="5266944" y="799048"/>
+            <a:ext cx="3474720" cy="470000"/>
           </a:xfrm>
           <a:prstGeom prst="rect">
             <a:avLst/>
@@ -3943,8 +3943,8 @@
         </p:nvSpPr>
         <p:spPr>
           <a:xfrm>
-            <a:off x="5084064" y="1892807"/>
-            <a:ext cx="3840480" cy="1325880"/>
+            <a:off x="5084064" y="1801248"/>
+            <a:ext cx="3840480" cy="1261872"/>
           </a:xfrm>
           <a:prstGeom prst="rect">
             <a:avLst/>
@@ -3988,8 +3988,8 @@
         </p:nvSpPr>
         <p:spPr>
           <a:xfrm>
-            <a:off x="5084064" y="1892807"/>
-            <a:ext cx="55000" cy="1325880"/>
+            <a:off x="5084064" y="1801248"/>
+            <a:ext cx="55000" cy="1261872"/>
           </a:xfrm>
           <a:prstGeom prst="rect">
             <a:avLst/>
@@ -4031,8 +4031,8 @@
         </p:nvSpPr>
         <p:spPr>
           <a:xfrm>
-            <a:off x="5266944" y="1962807"/>
-            <a:ext cx="3474720" cy="380000"/>
+            <a:off x="5266944" y="1866248"/>
+            <a:ext cx="3474720" cy="340000"/>
           </a:xfrm>
           <a:prstGeom prst="rect">
             <a:avLst/>
@@ -4067,8 +4067,8 @@
         </p:nvSpPr>
         <p:spPr>
           <a:xfrm>
-            <a:off x="5266944" y="2342807"/>
-            <a:ext cx="3474720" cy="500000"/>
+            <a:off x="5266944" y="2216248"/>
+            <a:ext cx="3474720" cy="470000"/>
           </a:xfrm>
           <a:prstGeom prst="rect">
             <a:avLst/>
@@ -4103,8 +4103,8 @@
         </p:nvSpPr>
         <p:spPr>
           <a:xfrm>
-            <a:off x="5084064" y="3401568"/>
-            <a:ext cx="3840480" cy="1325880"/>
+            <a:off x="5084064" y="3218448"/>
+            <a:ext cx="3840480" cy="1261872"/>
           </a:xfrm>
           <a:prstGeom prst="rect">
             <a:avLst/>
@@ -4148,8 +4148,8 @@
         </p:nvSpPr>
         <p:spPr>
           <a:xfrm>
-            <a:off x="5084064" y="3401568"/>
-            <a:ext cx="55000" cy="1325880"/>
+            <a:off x="5084064" y="3218448"/>
+            <a:ext cx="55000" cy="1261872"/>
           </a:xfrm>
           <a:prstGeom prst="rect">
             <a:avLst/>
@@ -4191,8 +4191,8 @@
         </p:nvSpPr>
         <p:spPr>
           <a:xfrm>
-            <a:off x="5266944" y="3471568"/>
-            <a:ext cx="3474720" cy="380000"/>
+            <a:off x="5266944" y="3283448"/>
+            <a:ext cx="3474720" cy="340000"/>
           </a:xfrm>
           <a:prstGeom prst="rect">
             <a:avLst/>
@@ -4227,8 +4227,8 @@
         </p:nvSpPr>
         <p:spPr>
           <a:xfrm>
-            <a:off x="5266944" y="3851568"/>
-            <a:ext cx="3474720" cy="500000"/>
+            <a:off x="5266944" y="3633448"/>
+            <a:ext cx="3474720" cy="470000"/>
           </a:xfrm>
           <a:prstGeom prst="rect">
             <a:avLst/>
@@ -13165,7 +13165,7 @@
         <p:spPr>
           <a:xfrm>
             <a:off x="274320" y="594360"/>
-            <a:ext cx="1645920" cy="200000"/>
+            <a:ext cx="1600200" cy="200000"/>
           </a:xfrm>
           <a:prstGeom prst="rect">
             <a:avLst/>
@@ -13200,7 +13200,7 @@
         <p:spPr>
           <a:xfrm>
             <a:off x="274320" y="786384"/>
-            <a:ext cx="1691640" cy="230000"/>
+            <a:ext cx="1645920" cy="230000"/>
           </a:xfrm>
           <a:prstGeom prst="rect">
             <a:avLst/>
@@ -13234,8 +13234,8 @@
         </p:nvSpPr>
         <p:spPr>
           <a:xfrm>
-            <a:off x="2039112" y="594360"/>
-            <a:ext cx="1645920" cy="200000"/>
+            <a:off x="1993392" y="594360"/>
+            <a:ext cx="1600200" cy="200000"/>
           </a:xfrm>
           <a:prstGeom prst="rect">
             <a:avLst/>
@@ -13269,8 +13269,8 @@
         </p:nvSpPr>
         <p:spPr>
           <a:xfrm>
-            <a:off x="2039112" y="786384"/>
-            <a:ext cx="1691640" cy="230000"/>
+            <a:off x="1993392" y="786384"/>
+            <a:ext cx="1645920" cy="230000"/>
           </a:xfrm>
           <a:prstGeom prst="rect">
             <a:avLst/>
@@ -13304,8 +13304,8 @@
         </p:nvSpPr>
         <p:spPr>
           <a:xfrm>
-            <a:off x="3803904" y="594360"/>
-            <a:ext cx="1645920" cy="200000"/>
+            <a:off x="3712464" y="594360"/>
+            <a:ext cx="1600200" cy="200000"/>
           </a:xfrm>
           <a:prstGeom prst="rect">
             <a:avLst/>
@@ -13339,8 +13339,8 @@
         </p:nvSpPr>
         <p:spPr>
           <a:xfrm>
-            <a:off x="3803904" y="786384"/>
-            <a:ext cx="1691640" cy="230000"/>
+            <a:off x="3712464" y="786384"/>
+            <a:ext cx="1645920" cy="230000"/>
           </a:xfrm>
           <a:prstGeom prst="rect">
             <a:avLst/>
@@ -13374,8 +13374,8 @@
         </p:nvSpPr>
         <p:spPr>
           <a:xfrm>
-            <a:off x="5568696" y="594360"/>
-            <a:ext cx="1645920" cy="200000"/>
+            <a:off x="5431536" y="594360"/>
+            <a:ext cx="1600200" cy="200000"/>
           </a:xfrm>
           <a:prstGeom prst="rect">
             <a:avLst/>
@@ -13409,8 +13409,8 @@
         </p:nvSpPr>
         <p:spPr>
           <a:xfrm>
-            <a:off x="5568696" y="786384"/>
-            <a:ext cx="1691640" cy="230000"/>
+            <a:off x="5431536" y="786384"/>
+            <a:ext cx="1645920" cy="230000"/>
           </a:xfrm>
           <a:prstGeom prst="rect">
             <a:avLst/>
@@ -13444,8 +13444,8 @@
         </p:nvSpPr>
         <p:spPr>
           <a:xfrm>
-            <a:off x="7333488" y="594360"/>
-            <a:ext cx="1645920" cy="200000"/>
+            <a:off x="7150608" y="594360"/>
+            <a:ext cx="1600200" cy="200000"/>
           </a:xfrm>
           <a:prstGeom prst="rect">
             <a:avLst/>
@@ -13479,8 +13479,8 @@
         </p:nvSpPr>
         <p:spPr>
           <a:xfrm>
-            <a:off x="7333488" y="786384"/>
-            <a:ext cx="1691640" cy="230000"/>
+            <a:off x="7150608" y="786384"/>
+            <a:ext cx="1645920" cy="230000"/>
           </a:xfrm>
           <a:prstGeom prst="rect">
             <a:avLst/>
